--- a/VisionAI_Demo_Presentation.pptx
+++ b/VisionAI_Demo_Presentation.pptx
@@ -3376,7 +3376,7 @@
           <a:p>
             <a:pPr algn="l"/>
             <a:r>
-              <a:rPr sz="2000" b="0" i="1">
+              <a:rPr sz="2000" b="0" i="1" dirty="0">
                 <a:solidFill>
                   <a:srgbClr val="CCCCCC"/>
                 </a:solidFill>
@@ -6475,7 +6475,7 @@
           <a:p>
             <a:pPr algn="l"/>
             <a:r>
-              <a:rPr sz="1200" b="0" i="0">
+              <a:rPr sz="1200" b="0" i="0" dirty="0">
                 <a:solidFill>
                   <a:srgbClr val="CCCCCC"/>
                 </a:solidFill>
@@ -6509,12 +6509,44 @@
           <a:p>
             <a:pPr algn="l"/>
             <a:r>
-              <a:rPr sz="1200" b="0" i="0">
-                <a:solidFill>
-                  <a:srgbClr val="CCCCCC"/>
-                </a:solidFill>
-              </a:rPr>
-              <a:t>• DeepFace / Facenet — face embedding (128-dim)</a:t>
+              <a:rPr sz="1200" b="0" i="0" dirty="0">
+                <a:solidFill>
+                  <a:srgbClr val="CCCCCC"/>
+                </a:solidFill>
+              </a:rPr>
+              <a:t>• </a:t>
+            </a:r>
+            <a:r>
+              <a:rPr sz="1200" b="0" i="0" dirty="0" err="1">
+                <a:solidFill>
+                  <a:srgbClr val="CCCCCC"/>
+                </a:solidFill>
+              </a:rPr>
+              <a:t>DeepFace</a:t>
+            </a:r>
+            <a:r>
+              <a:rPr sz="1200" b="0" i="0" dirty="0">
+                <a:solidFill>
+                  <a:srgbClr val="CCCCCC"/>
+                </a:solidFill>
+              </a:rPr>
+              <a:t> / </a:t>
+            </a:r>
+            <a:r>
+              <a:rPr sz="1200" b="0" i="0" dirty="0" err="1">
+                <a:solidFill>
+                  <a:srgbClr val="CCCCCC"/>
+                </a:solidFill>
+              </a:rPr>
+              <a:t>Facenet</a:t>
+            </a:r>
+            <a:r>
+              <a:rPr sz="1200" b="0" i="0" dirty="0">
+                <a:solidFill>
+                  <a:srgbClr val="CCCCCC"/>
+                </a:solidFill>
+              </a:rPr>
+              <a:t> — face embedding (128-dim)</a:t>
             </a:r>
           </a:p>
         </p:txBody>
@@ -6543,7 +6575,7 @@
           <a:p>
             <a:pPr algn="l"/>
             <a:r>
-              <a:rPr sz="1200" b="0" i="0">
+              <a:rPr sz="1200" b="0" i="0" dirty="0">
                 <a:solidFill>
                   <a:srgbClr val="CCCCCC"/>
                 </a:solidFill>
@@ -6577,12 +6609,28 @@
           <a:p>
             <a:pPr algn="l"/>
             <a:r>
-              <a:rPr sz="1200" b="0" i="0">
-                <a:solidFill>
-                  <a:srgbClr val="CCCCCC"/>
-                </a:solidFill>
-              </a:rPr>
-              <a:t>• ffmpeg — H.264 annotated video output</a:t>
+              <a:rPr sz="1200" b="0" i="0" dirty="0">
+                <a:solidFill>
+                  <a:srgbClr val="CCCCCC"/>
+                </a:solidFill>
+              </a:rPr>
+              <a:t>• </a:t>
+            </a:r>
+            <a:r>
+              <a:rPr sz="1200" b="0" i="0" dirty="0" err="1">
+                <a:solidFill>
+                  <a:srgbClr val="CCCCCC"/>
+                </a:solidFill>
+              </a:rPr>
+              <a:t>ffmpeg</a:t>
+            </a:r>
+            <a:r>
+              <a:rPr sz="1200" b="0" i="0" dirty="0">
+                <a:solidFill>
+                  <a:srgbClr val="CCCCCC"/>
+                </a:solidFill>
+              </a:rPr>
+              <a:t> — H.264 annotated video output</a:t>
             </a:r>
           </a:p>
         </p:txBody>
